--- a/Lilium Restaurant Management System Presentation.pptx
+++ b/Lilium Restaurant Management System Presentation.pptx
@@ -5937,8 +5937,8 @@
         </p:nvSpPr>
         <p:spPr>
           <a:xfrm>
-            <a:off x="307072" y="3669200"/>
-            <a:ext cx="2651760" cy="274320"/>
+            <a:off x="327544" y="3641904"/>
+            <a:ext cx="2552134" cy="198166"/>
           </a:xfrm>
           <a:prstGeom prst="rect">
             <a:avLst/>
@@ -5976,8 +5976,8 @@
         </p:nvSpPr>
         <p:spPr>
           <a:xfrm>
-            <a:off x="307072" y="3970952"/>
-            <a:ext cx="2651760" cy="548640"/>
+            <a:off x="327544" y="3943656"/>
+            <a:ext cx="2552134" cy="396332"/>
           </a:xfrm>
           <a:prstGeom prst="rect">
             <a:avLst/>
@@ -6015,8 +6015,8 @@
         </p:nvSpPr>
         <p:spPr>
           <a:xfrm>
-            <a:off x="3177880" y="3669200"/>
-            <a:ext cx="2651760" cy="274320"/>
+            <a:off x="3300712" y="3641904"/>
+            <a:ext cx="2552134" cy="198166"/>
           </a:xfrm>
           <a:prstGeom prst="rect">
             <a:avLst/>
@@ -6054,8 +6054,8 @@
         </p:nvSpPr>
         <p:spPr>
           <a:xfrm>
-            <a:off x="3177880" y="3970952"/>
-            <a:ext cx="2651760" cy="548640"/>
+            <a:off x="3300712" y="3943656"/>
+            <a:ext cx="2552134" cy="396332"/>
           </a:xfrm>
           <a:prstGeom prst="rect">
             <a:avLst/>
@@ -6093,8 +6093,8 @@
         </p:nvSpPr>
         <p:spPr>
           <a:xfrm>
-            <a:off x="6130576" y="3669200"/>
-            <a:ext cx="2651760" cy="274320"/>
+            <a:off x="6301176" y="3641904"/>
+            <a:ext cx="2552134" cy="198166"/>
           </a:xfrm>
           <a:prstGeom prst="rect">
             <a:avLst/>
@@ -6132,8 +6132,8 @@
         </p:nvSpPr>
         <p:spPr>
           <a:xfrm>
-            <a:off x="6130576" y="3970952"/>
-            <a:ext cx="2651760" cy="548640"/>
+            <a:off x="6301176" y="3943656"/>
+            <a:ext cx="2552134" cy="396332"/>
           </a:xfrm>
           <a:prstGeom prst="rect">
             <a:avLst/>
@@ -6184,39 +6184,30 @@
         </p:blipFill>
         <p:spPr>
           <a:xfrm>
-            <a:off x="217971" y="1191313"/>
-            <a:ext cx="2688863" cy="2131918"/>
+            <a:off x="340662" y="1288591"/>
+            <a:ext cx="2443482" cy="1937362"/>
           </a:xfrm>
           <a:prstGeom prst="roundRect">
             <a:avLst>
               <a:gd name="adj" fmla="val 4167"/>
             </a:avLst>
           </a:prstGeom>
-          <a:solidFill>
-            <a:srgbClr val="FFFFFF"/>
-          </a:solidFill>
-          <a:ln w="76200" cap="sq">
-            <a:solidFill>
-              <a:srgbClr val="EAEAEA"/>
-            </a:solidFill>
-            <a:miter lim="800000"/>
-          </a:ln>
-          <a:effectLst>
-            <a:reflection blurRad="12700" stA="33000" endPos="28000" dist="5000" dir="5400000" sy="-100000" algn="bl" rotWithShape="0"/>
-          </a:effectLst>
-          <a:scene3d>
-            <a:camera prst="orthographicFront"/>
-            <a:lightRig rig="threePt" dir="t">
-              <a:rot lat="0" lon="0" rev="2700000"/>
-            </a:lightRig>
-          </a:scene3d>
-          <a:sp3d contourW="6350">
-            <a:bevelT h="38100"/>
-            <a:contourClr>
-              <a:srgbClr val="C0C0C0"/>
-            </a:contourClr>
-          </a:sp3d>
-        </p:spPr>
+          <a:ln/>
+        </p:spPr>
+        <p:style>
+          <a:lnRef idx="2">
+            <a:schemeClr val="accent2"/>
+          </a:lnRef>
+          <a:fillRef idx="1">
+            <a:schemeClr val="lt1"/>
+          </a:fillRef>
+          <a:effectRef idx="0">
+            <a:schemeClr val="accent2"/>
+          </a:effectRef>
+          <a:fontRef idx="minor">
+            <a:schemeClr val="dk1"/>
+          </a:fontRef>
+        </p:style>
       </p:pic>
       <p:pic>
         <p:nvPicPr>
@@ -6239,39 +6230,30 @@
         </p:blipFill>
         <p:spPr>
           <a:xfrm>
-            <a:off x="3136725" y="1203493"/>
-            <a:ext cx="2797679" cy="2137025"/>
+            <a:off x="3264381" y="1301004"/>
+            <a:ext cx="2542368" cy="1942004"/>
           </a:xfrm>
           <a:prstGeom prst="roundRect">
             <a:avLst>
               <a:gd name="adj" fmla="val 4167"/>
             </a:avLst>
           </a:prstGeom>
-          <a:solidFill>
-            <a:srgbClr val="FFFFFF"/>
-          </a:solidFill>
-          <a:ln w="76200" cap="sq">
-            <a:solidFill>
-              <a:srgbClr val="EAEAEA"/>
-            </a:solidFill>
-            <a:miter lim="800000"/>
-          </a:ln>
-          <a:effectLst>
-            <a:reflection blurRad="12700" stA="33000" endPos="28000" dist="5000" dir="5400000" sy="-100000" algn="bl" rotWithShape="0"/>
-          </a:effectLst>
-          <a:scene3d>
-            <a:camera prst="orthographicFront"/>
-            <a:lightRig rig="threePt" dir="t">
-              <a:rot lat="0" lon="0" rev="2700000"/>
-            </a:lightRig>
-          </a:scene3d>
-          <a:sp3d contourW="6350">
-            <a:bevelT h="38100"/>
-            <a:contourClr>
-              <a:srgbClr val="C0C0C0"/>
-            </a:contourClr>
-          </a:sp3d>
-        </p:spPr>
+          <a:ln/>
+        </p:spPr>
+        <p:style>
+          <a:lnRef idx="2">
+            <a:schemeClr val="accent2"/>
+          </a:lnRef>
+          <a:fillRef idx="1">
+            <a:schemeClr val="lt1"/>
+          </a:fillRef>
+          <a:effectRef idx="0">
+            <a:schemeClr val="accent2"/>
+          </a:effectRef>
+          <a:fontRef idx="minor">
+            <a:schemeClr val="dk1"/>
+          </a:fontRef>
+        </p:style>
       </p:pic>
       <p:pic>
         <p:nvPicPr>
@@ -6294,39 +6276,30 @@
         </p:blipFill>
         <p:spPr>
           <a:xfrm>
-            <a:off x="6153242" y="1196275"/>
-            <a:ext cx="2797679" cy="2148713"/>
+            <a:off x="6280898" y="1294319"/>
+            <a:ext cx="2542368" cy="1952626"/>
           </a:xfrm>
           <a:prstGeom prst="roundRect">
             <a:avLst>
               <a:gd name="adj" fmla="val 4167"/>
             </a:avLst>
           </a:prstGeom>
-          <a:solidFill>
-            <a:srgbClr val="FFFFFF"/>
-          </a:solidFill>
-          <a:ln w="76200" cap="sq">
-            <a:solidFill>
-              <a:srgbClr val="EAEAEA"/>
-            </a:solidFill>
-            <a:miter lim="800000"/>
-          </a:ln>
-          <a:effectLst>
-            <a:reflection blurRad="12700" stA="33000" endPos="28000" dist="5000" dir="5400000" sy="-100000" algn="bl" rotWithShape="0"/>
-          </a:effectLst>
-          <a:scene3d>
-            <a:camera prst="orthographicFront"/>
-            <a:lightRig rig="threePt" dir="t">
-              <a:rot lat="0" lon="0" rev="2700000"/>
-            </a:lightRig>
-          </a:scene3d>
-          <a:sp3d contourW="6350">
-            <a:bevelT h="38100"/>
-            <a:contourClr>
-              <a:srgbClr val="C0C0C0"/>
-            </a:contourClr>
-          </a:sp3d>
-        </p:spPr>
+          <a:ln/>
+        </p:spPr>
+        <p:style>
+          <a:lnRef idx="2">
+            <a:schemeClr val="accent2"/>
+          </a:lnRef>
+          <a:fillRef idx="1">
+            <a:schemeClr val="lt1"/>
+          </a:fillRef>
+          <a:effectRef idx="0">
+            <a:schemeClr val="accent2"/>
+          </a:effectRef>
+          <a:fontRef idx="minor">
+            <a:schemeClr val="dk1"/>
+          </a:fontRef>
+        </p:style>
       </p:pic>
     </p:spTree>
   </p:cSld>
